--- a/assignment/Slide_BaoCao_QLBenhVien.pptx
+++ b/assignment/Slide_BaoCao_QLBenhVien.pptx
@@ -7084,8 +7084,8 @@
         </p:blipFill>
         <p:spPr>
           <a:xfrm>
-            <a:off x="1752447" y="1280160"/>
-            <a:ext cx="8686800" cy="18417006"/>
+            <a:off x="4845084" y="1280160"/>
+            <a:ext cx="2501525" cy="5303520"/>
           </a:xfrm>
           <a:prstGeom prst="rect">
             <a:avLst/>
@@ -7247,8 +7247,8 @@
         </p:blipFill>
         <p:spPr>
           <a:xfrm>
-            <a:off x="2438247" y="1280160"/>
-            <a:ext cx="7315200" cy="6922262"/>
+            <a:off x="3293561" y="1280160"/>
+            <a:ext cx="5604571" cy="5303520"/>
           </a:xfrm>
           <a:prstGeom prst="rect">
             <a:avLst/>
@@ -7410,8 +7410,8 @@
         </p:blipFill>
         <p:spPr>
           <a:xfrm>
-            <a:off x="2438247" y="1280160"/>
-            <a:ext cx="7315200" cy="6946900"/>
+            <a:off x="3303500" y="1280160"/>
+            <a:ext cx="5584693" cy="5303520"/>
           </a:xfrm>
           <a:prstGeom prst="rect">
             <a:avLst/>
@@ -7573,8 +7573,8 @@
         </p:blipFill>
         <p:spPr>
           <a:xfrm>
-            <a:off x="1981047" y="1280160"/>
-            <a:ext cx="8229600" cy="8985338"/>
+            <a:off x="3667121" y="1280160"/>
+            <a:ext cx="4857452" cy="5303520"/>
           </a:xfrm>
           <a:prstGeom prst="rect">
             <a:avLst/>
